--- a/Thesis_Presentation_SonaliSingh.pptx
+++ b/Thesis_Presentation_SonaliSingh.pptx
@@ -2146,9 +2146,6 @@
           <a:bodyPr wrap="square" rtlCol="0" anchor="ctr"/>
           <a:lstStyle/>
           <a:p>
-            <a:pPr marL="0" indent="0">
-              <a:buNone/>
-            </a:pPr>
             <a:r>
               <a:rPr lang="en-US" sz="1600" dirty="0">
                 <a:solidFill>
@@ -2179,7 +2176,23 @@
                 <a:ea typeface="Calibri" pitchFamily="34" charset="-122"/>
                 <a:cs typeface="Calibri" pitchFamily="34" charset="-120"/>
               </a:rPr>
-              <a:t>Sonali Singh - 25253051</a:t>
+              <a:t>Sonali Singh – 25253051</a:t>
+            </a:r>
+            <a:br>
+              <a:rPr lang="en-US" sz="1600" dirty="0">
+                <a:solidFill>
+                  <a:srgbClr val="475569"/>
+                </a:solidFill>
+                <a:latin typeface="Calibri" pitchFamily="34" charset="0"/>
+                <a:ea typeface="Calibri" pitchFamily="34" charset="-122"/>
+                <a:cs typeface="Calibri" pitchFamily="34" charset="-120"/>
+              </a:rPr>
+            </a:br>
+            <a:r>
+              <a:rPr lang="en-IN" sz="1600" dirty="0">
+                <a:hlinkClick r:id="rId3"/>
+              </a:rPr>
+              <a:t>SonaliSingh26/ST606-Msc-in-Data-Science-and-Analytics-Project-Dissertation-: Thesis</a:t>
             </a:r>
             <a:endParaRPr lang="en-US" sz="1600" dirty="0"/>
           </a:p>

--- a/Thesis_Presentation_SonaliSingh.pptx
+++ b/Thesis_Presentation_SonaliSingh.pptx
@@ -2133,8 +2133,8 @@
         </p:nvSpPr>
         <p:spPr>
           <a:xfrm>
-            <a:off x="548316" y="3863340"/>
-            <a:ext cx="8229600" cy="365760"/>
+            <a:off x="502920" y="3496235"/>
+            <a:ext cx="8229600" cy="732865"/>
           </a:xfrm>
           <a:prstGeom prst="rect">
             <a:avLst/>
@@ -2189,12 +2189,17 @@
               </a:rPr>
             </a:br>
             <a:r>
-              <a:rPr lang="en-IN" sz="1600" dirty="0">
-                <a:hlinkClick r:id="rId3"/>
-              </a:rPr>
-              <a:t>SonaliSingh26/ST606-Msc-in-Data-Science-and-Analytics-Project-Dissertation-: Thesis</a:t>
-            </a:r>
-            <a:endParaRPr lang="en-US" sz="1600" dirty="0"/>
+              <a:rPr lang="en-US" sz="1600" i="1" dirty="0">
+                <a:solidFill>
+                  <a:srgbClr val="475569"/>
+                </a:solidFill>
+                <a:latin typeface="Calibri" pitchFamily="34" charset="0"/>
+                <a:ea typeface="Calibri" pitchFamily="34" charset="-122"/>
+                <a:cs typeface="Calibri" pitchFamily="34" charset="-120"/>
+              </a:rPr>
+              <a:t>https://github.com/SonaliSingh26/ST606-Msc-in-Data-Science-and-Analytics-Project-Dissertation-</a:t>
+            </a:r>
+            <a:endParaRPr lang="en-US" sz="1600" i="1" dirty="0"/>
           </a:p>
         </p:txBody>
       </p:sp>
